--- a/Slides/Week02/01：大型語言模型的問題.pptx
+++ b/Slides/Week02/01：大型語言模型的問題.pptx
@@ -205,7 +205,7 @@
           <a:p>
             <a:fld id="{F785EE25-D279-4E8A-82B2-242DE63316C2}" type="datetimeFigureOut">
               <a:rPr lang="zh-TW" altLang="en-US" smtClean="0"/>
-              <a:t>2024/3/22</a:t>
+              <a:t>2024/12/4</a:t>
             </a:fld>
             <a:endParaRPr lang="zh-TW" altLang="en-US"/>
           </a:p>
@@ -1811,7 +1811,7 @@
           <a:p>
             <a:fld id="{2CCED9AC-320B-4C15-AB56-B07439D4A17D}" type="datetimeFigureOut">
               <a:rPr lang="zh-TW" altLang="en-US" smtClean="0"/>
-              <a:t>2024/3/22</a:t>
+              <a:t>2024/12/4</a:t>
             </a:fld>
             <a:endParaRPr lang="zh-TW" altLang="en-US"/>
           </a:p>
@@ -2009,7 +2009,7 @@
           <a:p>
             <a:fld id="{2CCED9AC-320B-4C15-AB56-B07439D4A17D}" type="datetimeFigureOut">
               <a:rPr lang="zh-TW" altLang="en-US" smtClean="0"/>
-              <a:t>2024/3/22</a:t>
+              <a:t>2024/12/4</a:t>
             </a:fld>
             <a:endParaRPr lang="zh-TW" altLang="en-US"/>
           </a:p>
@@ -2217,7 +2217,7 @@
           <a:p>
             <a:fld id="{2CCED9AC-320B-4C15-AB56-B07439D4A17D}" type="datetimeFigureOut">
               <a:rPr lang="zh-TW" altLang="en-US" smtClean="0"/>
-              <a:t>2024/3/22</a:t>
+              <a:t>2024/12/4</a:t>
             </a:fld>
             <a:endParaRPr lang="zh-TW" altLang="en-US"/>
           </a:p>
@@ -2598,7 +2598,7 @@
                 </a:solidFill>
               </a:rPr>
               <a:pPr/>
-              <a:t>3/22/2024</a:t>
+              <a:t>12/4/2024</a:t>
             </a:fld>
             <a:endParaRPr kumimoji="0" lang="en-US" dirty="0"/>
           </a:p>
@@ -2829,7 +2829,7 @@
                 </a:solidFill>
               </a:rPr>
               <a:pPr/>
-              <a:t>3/22/2024</a:t>
+              <a:t>12/4/2024</a:t>
             </a:fld>
             <a:endParaRPr kumimoji="0" lang="en-US" dirty="0"/>
           </a:p>
@@ -3062,7 +3062,7 @@
                 </a:solidFill>
               </a:rPr>
               <a:pPr/>
-              <a:t>3/22/2024</a:t>
+              <a:t>12/4/2024</a:t>
             </a:fld>
             <a:endParaRPr kumimoji="0" lang="en-US" dirty="0"/>
           </a:p>
@@ -3544,7 +3544,7 @@
                 </a:solidFill>
               </a:rPr>
               <a:pPr/>
-              <a:t>3/22/2024</a:t>
+              <a:t>12/4/2024</a:t>
             </a:fld>
             <a:endParaRPr kumimoji="0" lang="en-US" dirty="0"/>
           </a:p>
@@ -3901,7 +3901,7 @@
                 </a:solidFill>
               </a:rPr>
               <a:pPr/>
-              <a:t>3/22/2024</a:t>
+              <a:t>12/4/2024</a:t>
             </a:fld>
             <a:endParaRPr kumimoji="0" lang="en-US" dirty="0"/>
           </a:p>
@@ -4264,7 +4264,7 @@
                 </a:solidFill>
               </a:rPr>
               <a:pPr/>
-              <a:t>3/22/2024</a:t>
+              <a:t>12/4/2024</a:t>
             </a:fld>
             <a:endParaRPr kumimoji="0" lang="en-US" dirty="0"/>
           </a:p>
@@ -4574,7 +4574,7 @@
                 </a:solidFill>
               </a:rPr>
               <a:pPr/>
-              <a:t>3/22/2024</a:t>
+              <a:t>12/4/2024</a:t>
             </a:fld>
             <a:endParaRPr kumimoji="0" lang="en-US" dirty="0"/>
           </a:p>
@@ -4769,7 +4769,7 @@
           <a:p>
             <a:fld id="{2CCED9AC-320B-4C15-AB56-B07439D4A17D}" type="datetimeFigureOut">
               <a:rPr lang="zh-TW" altLang="en-US" smtClean="0"/>
-              <a:t>2024/3/22</a:t>
+              <a:t>2024/12/4</a:t>
             </a:fld>
             <a:endParaRPr lang="zh-TW" altLang="en-US"/>
           </a:p>
@@ -5253,7 +5253,7 @@
                 </a:solidFill>
               </a:rPr>
               <a:pPr/>
-              <a:t>3/22/2024</a:t>
+              <a:t>12/4/2024</a:t>
             </a:fld>
             <a:endParaRPr kumimoji="0" lang="en-US" dirty="0"/>
           </a:p>
@@ -5649,7 +5649,7 @@
                 </a:solidFill>
               </a:rPr>
               <a:pPr/>
-              <a:t>3/22/2024</a:t>
+              <a:t>12/4/2024</a:t>
             </a:fld>
             <a:endParaRPr kumimoji="0" lang="en-US" dirty="0"/>
           </a:p>
@@ -5989,7 +5989,7 @@
                 </a:solidFill>
               </a:rPr>
               <a:pPr/>
-              <a:t>3/22/2024</a:t>
+              <a:t>12/4/2024</a:t>
             </a:fld>
             <a:endParaRPr kumimoji="0" lang="en-US" dirty="0"/>
           </a:p>
@@ -6570,7 +6570,7 @@
                 </a:solidFill>
               </a:rPr>
               <a:pPr/>
-              <a:t>3/22/2024</a:t>
+              <a:t>12/4/2024</a:t>
             </a:fld>
             <a:endParaRPr kumimoji="0" lang="en-US" dirty="0"/>
           </a:p>
@@ -7139,7 +7139,7 @@
                 </a:solidFill>
               </a:rPr>
               <a:pPr/>
-              <a:t>3/22/2024</a:t>
+              <a:t>12/4/2024</a:t>
             </a:fld>
             <a:endParaRPr kumimoji="0" lang="en-US" dirty="0"/>
           </a:p>
@@ -7603,7 +7603,7 @@
                 </a:solidFill>
               </a:rPr>
               <a:pPr/>
-              <a:t>3/22/2024</a:t>
+              <a:t>12/4/2024</a:t>
             </a:fld>
             <a:endParaRPr kumimoji="0" lang="en-US" dirty="0"/>
           </a:p>
@@ -8032,7 +8032,7 @@
                 </a:solidFill>
               </a:rPr>
               <a:pPr/>
-              <a:t>3/22/2024</a:t>
+              <a:t>12/4/2024</a:t>
             </a:fld>
             <a:endParaRPr kumimoji="0" lang="en-US" dirty="0"/>
           </a:p>
@@ -8541,7 +8541,7 @@
                 </a:solidFill>
               </a:rPr>
               <a:pPr/>
-              <a:t>3/22/2024</a:t>
+              <a:t>12/4/2024</a:t>
             </a:fld>
             <a:endParaRPr kumimoji="0" lang="en-US" dirty="0"/>
           </a:p>
@@ -9050,7 +9050,7 @@
                 </a:solidFill>
               </a:rPr>
               <a:pPr/>
-              <a:t>3/22/2024</a:t>
+              <a:t>12/4/2024</a:t>
             </a:fld>
             <a:endParaRPr kumimoji="0" lang="en-US" dirty="0"/>
           </a:p>
@@ -9271,7 +9271,7 @@
                 </a:solidFill>
               </a:rPr>
               <a:pPr/>
-              <a:t>3/22/2024</a:t>
+              <a:t>12/4/2024</a:t>
             </a:fld>
             <a:endParaRPr kumimoji="0" lang="en-US" dirty="0"/>
           </a:p>
@@ -9543,7 +9543,7 @@
           <a:p>
             <a:fld id="{2CCED9AC-320B-4C15-AB56-B07439D4A17D}" type="datetimeFigureOut">
               <a:rPr lang="zh-TW" altLang="en-US" smtClean="0"/>
-              <a:t>2024/3/22</a:t>
+              <a:t>2024/12/4</a:t>
             </a:fld>
             <a:endParaRPr lang="zh-TW" altLang="en-US"/>
           </a:p>
@@ -9879,7 +9879,7 @@
                 </a:solidFill>
               </a:rPr>
               <a:pPr/>
-              <a:t>3/22/2024</a:t>
+              <a:t>12/4/2024</a:t>
             </a:fld>
             <a:endParaRPr kumimoji="0" lang="en-US" dirty="0"/>
           </a:p>
@@ -10103,7 +10103,7 @@
                 </a:solidFill>
               </a:rPr>
               <a:pPr/>
-              <a:t>3/22/2024</a:t>
+              <a:t>12/4/2024</a:t>
             </a:fld>
             <a:endParaRPr kumimoji="0" lang="en-US" dirty="0"/>
           </a:p>
@@ -10284,7 +10284,7 @@
             <a:fld id="{ACB2EC6F-6501-4E04-BD6C-A8A6CABB2C5B}" type="datetimeFigureOut">
               <a:rPr kumimoji="0" lang="en-US" smtClean="0"/>
               <a:pPr/>
-              <a:t>3/22/2024</a:t>
+              <a:t>12/4/2024</a:t>
             </a:fld>
             <a:endParaRPr kumimoji="0" lang="en-US" dirty="0"/>
           </a:p>
@@ -10568,7 +10568,7 @@
           <a:p>
             <a:fld id="{2CCED9AC-320B-4C15-AB56-B07439D4A17D}" type="datetimeFigureOut">
               <a:rPr lang="zh-TW" altLang="en-US" smtClean="0"/>
-              <a:t>2024/3/22</a:t>
+              <a:t>2024/12/4</a:t>
             </a:fld>
             <a:endParaRPr lang="zh-TW" altLang="en-US"/>
           </a:p>
@@ -10980,7 +10980,7 @@
           <a:p>
             <a:fld id="{2CCED9AC-320B-4C15-AB56-B07439D4A17D}" type="datetimeFigureOut">
               <a:rPr lang="zh-TW" altLang="en-US" smtClean="0"/>
-              <a:t>2024/3/22</a:t>
+              <a:t>2024/12/4</a:t>
             </a:fld>
             <a:endParaRPr lang="zh-TW" altLang="en-US"/>
           </a:p>
@@ -11121,7 +11121,7 @@
           <a:p>
             <a:fld id="{2CCED9AC-320B-4C15-AB56-B07439D4A17D}" type="datetimeFigureOut">
               <a:rPr lang="zh-TW" altLang="en-US" smtClean="0"/>
-              <a:t>2024/3/22</a:t>
+              <a:t>2024/12/4</a:t>
             </a:fld>
             <a:endParaRPr lang="zh-TW" altLang="en-US"/>
           </a:p>
@@ -11234,7 +11234,7 @@
           <a:p>
             <a:fld id="{2CCED9AC-320B-4C15-AB56-B07439D4A17D}" type="datetimeFigureOut">
               <a:rPr lang="zh-TW" altLang="en-US" smtClean="0"/>
-              <a:t>2024/3/22</a:t>
+              <a:t>2024/12/4</a:t>
             </a:fld>
             <a:endParaRPr lang="zh-TW" altLang="en-US"/>
           </a:p>
@@ -11545,7 +11545,7 @@
           <a:p>
             <a:fld id="{2CCED9AC-320B-4C15-AB56-B07439D4A17D}" type="datetimeFigureOut">
               <a:rPr lang="zh-TW" altLang="en-US" smtClean="0"/>
-              <a:t>2024/3/22</a:t>
+              <a:t>2024/12/4</a:t>
             </a:fld>
             <a:endParaRPr lang="zh-TW" altLang="en-US"/>
           </a:p>
@@ -11833,7 +11833,7 @@
           <a:p>
             <a:fld id="{2CCED9AC-320B-4C15-AB56-B07439D4A17D}" type="datetimeFigureOut">
               <a:rPr lang="zh-TW" altLang="en-US" smtClean="0"/>
-              <a:t>2024/3/22</a:t>
+              <a:t>2024/12/4</a:t>
             </a:fld>
             <a:endParaRPr lang="zh-TW" altLang="en-US"/>
           </a:p>
@@ -12074,7 +12074,7 @@
           <a:p>
             <a:fld id="{2CCED9AC-320B-4C15-AB56-B07439D4A17D}" type="datetimeFigureOut">
               <a:rPr lang="zh-TW" altLang="en-US" smtClean="0"/>
-              <a:t>2024/3/22</a:t>
+              <a:t>2024/12/4</a:t>
             </a:fld>
             <a:endParaRPr lang="zh-TW" altLang="en-US"/>
           </a:p>
@@ -12646,7 +12646,7 @@
                 </a:solidFill>
               </a:rPr>
               <a:pPr/>
-              <a:t>3/22/2024</a:t>
+              <a:t>12/4/2024</a:t>
             </a:fld>
             <a:endParaRPr kumimoji="0" lang="en-US" sz="1200" dirty="0">
               <a:solidFill>
